--- a/class/cloud_infra_mgmt/09주차_Terraform_IaC기초/01_강의자료/1차시_IaC개념과Terraform아키텍처.pptx
+++ b/class/cloud_infra_mgmt/09주차_Terraform_IaC기초/01_강의자료/1차시_IaC개념과Terraform아키텍처.pptx
@@ -10428,7 +10428,7 @@
               </a:lnSpc>
             </a:pPr>
             <a:r>
-              <a:rPr sz="1500" b="1">
+              <a:rPr sz="1700" b="1">
                 <a:solidFill>
                   <a:srgbClr val="0D9488"/>
                 </a:solidFill>
@@ -10437,7 +10437,7 @@
               <a:t>●  </a:t>
             </a:r>
             <a:r>
-              <a:rPr sz="1500" b="0">
+              <a:rPr sz="1700" b="0">
                 <a:solidFill>
                   <a:srgbClr val="222733"/>
                 </a:solidFill>
@@ -10453,7 +10453,7 @@
               </a:lnSpc>
             </a:pPr>
             <a:r>
-              <a:rPr sz="1500" b="1">
+              <a:rPr sz="1700" b="1">
                 <a:solidFill>
                   <a:srgbClr val="0D9488"/>
                 </a:solidFill>
@@ -10462,7 +10462,7 @@
               <a:t>●  </a:t>
             </a:r>
             <a:r>
-              <a:rPr sz="1500" b="0">
+              <a:rPr sz="1700" b="0">
                 <a:solidFill>
                   <a:srgbClr val="222733"/>
                 </a:solidFill>
@@ -10478,7 +10478,7 @@
               </a:lnSpc>
             </a:pPr>
             <a:r>
-              <a:rPr sz="1500" b="1">
+              <a:rPr sz="1700" b="1">
                 <a:solidFill>
                   <a:srgbClr val="0D9488"/>
                 </a:solidFill>
@@ -10487,7 +10487,7 @@
               <a:t>●  </a:t>
             </a:r>
             <a:r>
-              <a:rPr sz="1500" b="0">
+              <a:rPr sz="1700" b="0">
                 <a:solidFill>
                   <a:srgbClr val="222733"/>
                 </a:solidFill>

--- a/class/cloud_infra_mgmt/09주차_Terraform_IaC기초/01_강의자료/1차시_IaC개념과Terraform아키텍처.pptx
+++ b/class/cloud_infra_mgmt/09주차_Terraform_IaC기초/01_강의자료/1차시_IaC개념과Terraform아키텍처.pptx
@@ -5350,7 +5350,7 @@
           <a:p>
             <a:pPr>
               <a:lnSpc>
-                <a:spcPct val="115000"/>
+                <a:spcPct val="149500"/>
               </a:lnSpc>
             </a:pPr>
             <a:r>
@@ -5375,7 +5375,7 @@
           <a:p>
             <a:pPr>
               <a:lnSpc>
-                <a:spcPct val="115000"/>
+                <a:spcPct val="149500"/>
               </a:lnSpc>
             </a:pPr>
             <a:r>
@@ -5400,7 +5400,7 @@
           <a:p>
             <a:pPr>
               <a:lnSpc>
-                <a:spcPct val="115000"/>
+                <a:spcPct val="149500"/>
               </a:lnSpc>
             </a:pPr>
             <a:r>
@@ -5425,7 +5425,7 @@
           <a:p>
             <a:pPr>
               <a:lnSpc>
-                <a:spcPct val="115000"/>
+                <a:spcPct val="149500"/>
               </a:lnSpc>
             </a:pPr>
             <a:r>
@@ -5816,7 +5816,7 @@
           <a:p>
             <a:pPr>
               <a:lnSpc>
-                <a:spcPct val="115000"/>
+                <a:spcPct val="149500"/>
               </a:lnSpc>
             </a:pPr>
             <a:r>
@@ -5841,7 +5841,7 @@
           <a:p>
             <a:pPr>
               <a:lnSpc>
-                <a:spcPct val="115000"/>
+                <a:spcPct val="149500"/>
               </a:lnSpc>
             </a:pPr>
             <a:r>
@@ -5866,7 +5866,7 @@
           <a:p>
             <a:pPr>
               <a:lnSpc>
-                <a:spcPct val="115000"/>
+                <a:spcPct val="149500"/>
               </a:lnSpc>
             </a:pPr>
             <a:r>
@@ -6257,7 +6257,7 @@
           <a:p>
             <a:pPr>
               <a:lnSpc>
-                <a:spcPct val="115000"/>
+                <a:spcPct val="149500"/>
               </a:lnSpc>
             </a:pPr>
             <a:r>
@@ -6282,7 +6282,7 @@
           <a:p>
             <a:pPr>
               <a:lnSpc>
-                <a:spcPct val="115000"/>
+                <a:spcPct val="149500"/>
               </a:lnSpc>
             </a:pPr>
             <a:r>
@@ -6307,7 +6307,7 @@
           <a:p>
             <a:pPr>
               <a:lnSpc>
-                <a:spcPct val="115000"/>
+                <a:spcPct val="149500"/>
               </a:lnSpc>
             </a:pPr>
             <a:r>
@@ -7556,16 +7556,104 @@
       </p:sp>
       <p:sp>
         <p:nvSpPr>
-          <p:cNvPr id="7" name="Isosceles Triangle 6"/>
+          <p:cNvPr id="7" name="Rectangle 6"/>
           <p:cNvSpPr/>
           <p:nvPr/>
         </p:nvSpPr>
         <p:spPr>
-          <a:xfrm rot="5400000">
-            <a:off x="3495751" y="1673352"/>
-            <a:ext cx="146304" cy="146304"/>
-          </a:xfrm>
-          <a:prstGeom prst="triangle">
+          <a:xfrm>
+            <a:off x="5096865" y="1730959"/>
+            <a:ext cx="1995220" cy="31089"/>
+          </a:xfrm>
+          <a:prstGeom prst="rect">
+            <a:avLst/>
+          </a:prstGeom>
+          <a:solidFill>
+            <a:srgbClr val="14B8A6"/>
+          </a:solidFill>
+          <a:ln>
+            <a:noFill/>
+          </a:ln>
+          <a:effectLst/>
+        </p:spPr>
+        <p:style>
+          <a:lnRef idx="1">
+            <a:schemeClr val="accent1"/>
+          </a:lnRef>
+          <a:fillRef idx="3">
+            <a:schemeClr val="accent1"/>
+          </a:fillRef>
+          <a:effectRef idx="2">
+            <a:schemeClr val="accent1"/>
+          </a:effectRef>
+          <a:fontRef idx="minor">
+            <a:schemeClr val="lt1"/>
+          </a:fontRef>
+        </p:style>
+        <p:txBody>
+          <a:bodyPr rtlCol="0" anchor="ctr"/>
+          <a:lstStyle/>
+          <a:p>
+            <a:pPr algn="ctr"/>
+          </a:p>
+        </p:txBody>
+      </p:sp>
+      <p:sp>
+        <p:nvSpPr>
+          <p:cNvPr id="8" name="Rectangle 7"/>
+          <p:cNvSpPr/>
+          <p:nvPr/>
+        </p:nvSpPr>
+        <p:spPr>
+          <a:xfrm>
+            <a:off x="7622438" y="1730959"/>
+            <a:ext cx="1995220" cy="31089"/>
+          </a:xfrm>
+          <a:prstGeom prst="rect">
+            <a:avLst/>
+          </a:prstGeom>
+          <a:solidFill>
+            <a:srgbClr val="14B8A6"/>
+          </a:solidFill>
+          <a:ln>
+            <a:noFill/>
+          </a:ln>
+          <a:effectLst/>
+        </p:spPr>
+        <p:style>
+          <a:lnRef idx="1">
+            <a:schemeClr val="accent1"/>
+          </a:lnRef>
+          <a:fillRef idx="3">
+            <a:schemeClr val="accent1"/>
+          </a:fillRef>
+          <a:effectRef idx="2">
+            <a:schemeClr val="accent1"/>
+          </a:effectRef>
+          <a:fontRef idx="minor">
+            <a:schemeClr val="lt1"/>
+          </a:fontRef>
+        </p:style>
+        <p:txBody>
+          <a:bodyPr rtlCol="0" anchor="ctr"/>
+          <a:lstStyle/>
+          <a:p>
+            <a:pPr algn="ctr"/>
+          </a:p>
+        </p:txBody>
+      </p:sp>
+      <p:sp>
+        <p:nvSpPr>
+          <p:cNvPr id="9" name="Oval 8"/>
+          <p:cNvSpPr/>
+          <p:nvPr/>
+        </p:nvSpPr>
+        <p:spPr>
+          <a:xfrm>
+            <a:off x="2040940" y="1481328"/>
+            <a:ext cx="530352" cy="530352"/>
+          </a:xfrm>
+          <a:prstGeom prst="ellipse">
             <a:avLst/>
           </a:prstGeom>
           <a:solidFill>
@@ -7600,227 +7688,7 @@
       </p:sp>
       <p:sp>
         <p:nvSpPr>
-          <p:cNvPr id="8" name="Rectangle 7"/>
-          <p:cNvSpPr/>
-          <p:nvPr/>
-        </p:nvSpPr>
-        <p:spPr>
-          <a:xfrm>
-            <a:off x="5096865" y="1730959"/>
-            <a:ext cx="1995220" cy="31089"/>
-          </a:xfrm>
-          <a:prstGeom prst="rect">
-            <a:avLst/>
-          </a:prstGeom>
-          <a:solidFill>
-            <a:srgbClr val="14B8A6"/>
-          </a:solidFill>
-          <a:ln>
-            <a:noFill/>
-          </a:ln>
-          <a:effectLst/>
-        </p:spPr>
-        <p:style>
-          <a:lnRef idx="1">
-            <a:schemeClr val="accent1"/>
-          </a:lnRef>
-          <a:fillRef idx="3">
-            <a:schemeClr val="accent1"/>
-          </a:fillRef>
-          <a:effectRef idx="2">
-            <a:schemeClr val="accent1"/>
-          </a:effectRef>
-          <a:fontRef idx="minor">
-            <a:schemeClr val="lt1"/>
-          </a:fontRef>
-        </p:style>
-        <p:txBody>
-          <a:bodyPr rtlCol="0" anchor="ctr"/>
-          <a:lstStyle/>
-          <a:p>
-            <a:pPr algn="ctr"/>
-          </a:p>
-        </p:txBody>
-      </p:sp>
-      <p:sp>
-        <p:nvSpPr>
-          <p:cNvPr id="9" name="Isosceles Triangle 8"/>
-          <p:cNvSpPr/>
-          <p:nvPr/>
-        </p:nvSpPr>
-        <p:spPr>
-          <a:xfrm rot="5400000">
-            <a:off x="6021324" y="1673352"/>
-            <a:ext cx="146304" cy="146304"/>
-          </a:xfrm>
-          <a:prstGeom prst="triangle">
-            <a:avLst/>
-          </a:prstGeom>
-          <a:solidFill>
-            <a:srgbClr val="0D9488"/>
-          </a:solidFill>
-          <a:ln>
-            <a:noFill/>
-          </a:ln>
-          <a:effectLst/>
-        </p:spPr>
-        <p:style>
-          <a:lnRef idx="1">
-            <a:schemeClr val="accent1"/>
-          </a:lnRef>
-          <a:fillRef idx="3">
-            <a:schemeClr val="accent1"/>
-          </a:fillRef>
-          <a:effectRef idx="2">
-            <a:schemeClr val="accent1"/>
-          </a:effectRef>
-          <a:fontRef idx="minor">
-            <a:schemeClr val="lt1"/>
-          </a:fontRef>
-        </p:style>
-        <p:txBody>
-          <a:bodyPr rtlCol="0" anchor="ctr"/>
-          <a:lstStyle/>
-          <a:p>
-            <a:pPr algn="ctr"/>
-          </a:p>
-        </p:txBody>
-      </p:sp>
-      <p:sp>
-        <p:nvSpPr>
-          <p:cNvPr id="10" name="Rectangle 9"/>
-          <p:cNvSpPr/>
-          <p:nvPr/>
-        </p:nvSpPr>
-        <p:spPr>
-          <a:xfrm>
-            <a:off x="7622438" y="1730959"/>
-            <a:ext cx="1995220" cy="31089"/>
-          </a:xfrm>
-          <a:prstGeom prst="rect">
-            <a:avLst/>
-          </a:prstGeom>
-          <a:solidFill>
-            <a:srgbClr val="14B8A6"/>
-          </a:solidFill>
-          <a:ln>
-            <a:noFill/>
-          </a:ln>
-          <a:effectLst/>
-        </p:spPr>
-        <p:style>
-          <a:lnRef idx="1">
-            <a:schemeClr val="accent1"/>
-          </a:lnRef>
-          <a:fillRef idx="3">
-            <a:schemeClr val="accent1"/>
-          </a:fillRef>
-          <a:effectRef idx="2">
-            <a:schemeClr val="accent1"/>
-          </a:effectRef>
-          <a:fontRef idx="minor">
-            <a:schemeClr val="lt1"/>
-          </a:fontRef>
-        </p:style>
-        <p:txBody>
-          <a:bodyPr rtlCol="0" anchor="ctr"/>
-          <a:lstStyle/>
-          <a:p>
-            <a:pPr algn="ctr"/>
-          </a:p>
-        </p:txBody>
-      </p:sp>
-      <p:sp>
-        <p:nvSpPr>
-          <p:cNvPr id="11" name="Isosceles Triangle 10"/>
-          <p:cNvSpPr/>
-          <p:nvPr/>
-        </p:nvSpPr>
-        <p:spPr>
-          <a:xfrm rot="5400000">
-            <a:off x="8546896" y="1673352"/>
-            <a:ext cx="146304" cy="146304"/>
-          </a:xfrm>
-          <a:prstGeom prst="triangle">
-            <a:avLst/>
-          </a:prstGeom>
-          <a:solidFill>
-            <a:srgbClr val="0D9488"/>
-          </a:solidFill>
-          <a:ln>
-            <a:noFill/>
-          </a:ln>
-          <a:effectLst/>
-        </p:spPr>
-        <p:style>
-          <a:lnRef idx="1">
-            <a:schemeClr val="accent1"/>
-          </a:lnRef>
-          <a:fillRef idx="3">
-            <a:schemeClr val="accent1"/>
-          </a:fillRef>
-          <a:effectRef idx="2">
-            <a:schemeClr val="accent1"/>
-          </a:effectRef>
-          <a:fontRef idx="minor">
-            <a:schemeClr val="lt1"/>
-          </a:fontRef>
-        </p:style>
-        <p:txBody>
-          <a:bodyPr rtlCol="0" anchor="ctr"/>
-          <a:lstStyle/>
-          <a:p>
-            <a:pPr algn="ctr"/>
-          </a:p>
-        </p:txBody>
-      </p:sp>
-      <p:sp>
-        <p:nvSpPr>
-          <p:cNvPr id="12" name="Oval 11"/>
-          <p:cNvSpPr/>
-          <p:nvPr/>
-        </p:nvSpPr>
-        <p:spPr>
-          <a:xfrm>
-            <a:off x="2040940" y="1481328"/>
-            <a:ext cx="530352" cy="530352"/>
-          </a:xfrm>
-          <a:prstGeom prst="ellipse">
-            <a:avLst/>
-          </a:prstGeom>
-          <a:solidFill>
-            <a:srgbClr val="0D9488"/>
-          </a:solidFill>
-          <a:ln>
-            <a:noFill/>
-          </a:ln>
-          <a:effectLst/>
-        </p:spPr>
-        <p:style>
-          <a:lnRef idx="1">
-            <a:schemeClr val="accent1"/>
-          </a:lnRef>
-          <a:fillRef idx="3">
-            <a:schemeClr val="accent1"/>
-          </a:fillRef>
-          <a:effectRef idx="2">
-            <a:schemeClr val="accent1"/>
-          </a:effectRef>
-          <a:fontRef idx="minor">
-            <a:schemeClr val="lt1"/>
-          </a:fontRef>
-        </p:style>
-        <p:txBody>
-          <a:bodyPr rtlCol="0" anchor="ctr"/>
-          <a:lstStyle/>
-          <a:p>
-            <a:pPr algn="ctr"/>
-          </a:p>
-        </p:txBody>
-      </p:sp>
-      <p:sp>
-        <p:nvSpPr>
-          <p:cNvPr id="13" name="TextBox 12"/>
+          <p:cNvPr id="10" name="TextBox 9"/>
           <p:cNvSpPr txBox="1"/>
           <p:nvPr/>
         </p:nvSpPr>
@@ -7855,7 +7723,7 @@
       </p:sp>
       <p:sp>
         <p:nvSpPr>
-          <p:cNvPr id="14" name="Rounded Rectangle 13"/>
+          <p:cNvPr id="11" name="Rounded Rectangle 10"/>
           <p:cNvSpPr/>
           <p:nvPr/>
         </p:nvSpPr>
@@ -7903,7 +7771,7 @@
       </p:sp>
       <p:sp>
         <p:nvSpPr>
-          <p:cNvPr id="15" name="TextBox 14"/>
+          <p:cNvPr id="12" name="TextBox 11"/>
           <p:cNvSpPr txBox="1"/>
           <p:nvPr/>
         </p:nvSpPr>
@@ -7938,7 +7806,7 @@
       </p:sp>
       <p:sp>
         <p:nvSpPr>
-          <p:cNvPr id="16" name="TextBox 15"/>
+          <p:cNvPr id="13" name="TextBox 12"/>
           <p:cNvSpPr txBox="1"/>
           <p:nvPr/>
         </p:nvSpPr>
@@ -7977,7 +7845,7 @@
       </p:sp>
       <p:sp>
         <p:nvSpPr>
-          <p:cNvPr id="17" name="Oval 16"/>
+          <p:cNvPr id="14" name="Oval 13"/>
           <p:cNvSpPr/>
           <p:nvPr/>
         </p:nvSpPr>
@@ -8021,7 +7889,7 @@
       </p:sp>
       <p:sp>
         <p:nvSpPr>
-          <p:cNvPr id="18" name="TextBox 17"/>
+          <p:cNvPr id="15" name="TextBox 14"/>
           <p:cNvSpPr txBox="1"/>
           <p:nvPr/>
         </p:nvSpPr>
@@ -8056,7 +7924,7 @@
       </p:sp>
       <p:sp>
         <p:nvSpPr>
-          <p:cNvPr id="19" name="Rounded Rectangle 18"/>
+          <p:cNvPr id="16" name="Rounded Rectangle 15"/>
           <p:cNvSpPr/>
           <p:nvPr/>
         </p:nvSpPr>
@@ -8104,7 +7972,7 @@
       </p:sp>
       <p:sp>
         <p:nvSpPr>
-          <p:cNvPr id="20" name="TextBox 19"/>
+          <p:cNvPr id="17" name="TextBox 16"/>
           <p:cNvSpPr txBox="1"/>
           <p:nvPr/>
         </p:nvSpPr>
@@ -8139,7 +8007,7 @@
       </p:sp>
       <p:sp>
         <p:nvSpPr>
-          <p:cNvPr id="21" name="TextBox 20"/>
+          <p:cNvPr id="18" name="TextBox 17"/>
           <p:cNvSpPr txBox="1"/>
           <p:nvPr/>
         </p:nvSpPr>
@@ -8178,7 +8046,7 @@
       </p:sp>
       <p:sp>
         <p:nvSpPr>
-          <p:cNvPr id="22" name="Oval 21"/>
+          <p:cNvPr id="19" name="Oval 18"/>
           <p:cNvSpPr/>
           <p:nvPr/>
         </p:nvSpPr>
@@ -8222,7 +8090,7 @@
       </p:sp>
       <p:sp>
         <p:nvSpPr>
-          <p:cNvPr id="23" name="TextBox 22"/>
+          <p:cNvPr id="20" name="TextBox 19"/>
           <p:cNvSpPr txBox="1"/>
           <p:nvPr/>
         </p:nvSpPr>
@@ -8257,7 +8125,7 @@
       </p:sp>
       <p:sp>
         <p:nvSpPr>
-          <p:cNvPr id="24" name="Rounded Rectangle 23"/>
+          <p:cNvPr id="21" name="Rounded Rectangle 20"/>
           <p:cNvSpPr/>
           <p:nvPr/>
         </p:nvSpPr>
@@ -8305,7 +8173,7 @@
       </p:sp>
       <p:sp>
         <p:nvSpPr>
-          <p:cNvPr id="25" name="TextBox 24"/>
+          <p:cNvPr id="22" name="TextBox 21"/>
           <p:cNvSpPr txBox="1"/>
           <p:nvPr/>
         </p:nvSpPr>
@@ -8340,7 +8208,7 @@
       </p:sp>
       <p:sp>
         <p:nvSpPr>
-          <p:cNvPr id="26" name="TextBox 25"/>
+          <p:cNvPr id="23" name="TextBox 22"/>
           <p:cNvSpPr txBox="1"/>
           <p:nvPr/>
         </p:nvSpPr>
@@ -8379,7 +8247,7 @@
       </p:sp>
       <p:sp>
         <p:nvSpPr>
-          <p:cNvPr id="27" name="Oval 26"/>
+          <p:cNvPr id="24" name="Oval 23"/>
           <p:cNvSpPr/>
           <p:nvPr/>
         </p:nvSpPr>
@@ -8423,7 +8291,7 @@
       </p:sp>
       <p:sp>
         <p:nvSpPr>
-          <p:cNvPr id="28" name="TextBox 27"/>
+          <p:cNvPr id="25" name="TextBox 24"/>
           <p:cNvSpPr txBox="1"/>
           <p:nvPr/>
         </p:nvSpPr>
@@ -8458,7 +8326,7 @@
       </p:sp>
       <p:sp>
         <p:nvSpPr>
-          <p:cNvPr id="29" name="Rounded Rectangle 28"/>
+          <p:cNvPr id="26" name="Rounded Rectangle 25"/>
           <p:cNvSpPr/>
           <p:nvPr/>
         </p:nvSpPr>
@@ -8506,7 +8374,7 @@
       </p:sp>
       <p:sp>
         <p:nvSpPr>
-          <p:cNvPr id="30" name="TextBox 29"/>
+          <p:cNvPr id="27" name="TextBox 26"/>
           <p:cNvSpPr txBox="1"/>
           <p:nvPr/>
         </p:nvSpPr>
@@ -8541,7 +8409,7 @@
       </p:sp>
       <p:sp>
         <p:nvSpPr>
-          <p:cNvPr id="31" name="TextBox 30"/>
+          <p:cNvPr id="28" name="TextBox 27"/>
           <p:cNvSpPr txBox="1"/>
           <p:nvPr/>
         </p:nvSpPr>
@@ -8580,7 +8448,7 @@
       </p:sp>
       <p:sp>
         <p:nvSpPr>
-          <p:cNvPr id="32" name="TextBox 31"/>
+          <p:cNvPr id="29" name="TextBox 28"/>
           <p:cNvSpPr txBox="1"/>
           <p:nvPr/>
         </p:nvSpPr>
@@ -8615,7 +8483,7 @@
       </p:sp>
       <p:sp>
         <p:nvSpPr>
-          <p:cNvPr id="33" name="TextBox 32"/>
+          <p:cNvPr id="30" name="TextBox 29"/>
           <p:cNvSpPr txBox="1"/>
           <p:nvPr/>
         </p:nvSpPr>
@@ -8650,7 +8518,7 @@
       </p:sp>
       <p:sp>
         <p:nvSpPr>
-          <p:cNvPr id="34" name="Rectangle 33"/>
+          <p:cNvPr id="31" name="Rectangle 30"/>
           <p:cNvSpPr/>
           <p:nvPr/>
         </p:nvSpPr>
@@ -9174,7 +9042,7 @@
           <a:p>
             <a:pPr>
               <a:lnSpc>
-                <a:spcPct val="115000"/>
+                <a:spcPct val="149500"/>
               </a:lnSpc>
             </a:pPr>
             <a:r>
@@ -9199,7 +9067,7 @@
           <a:p>
             <a:pPr>
               <a:lnSpc>
-                <a:spcPct val="115000"/>
+                <a:spcPct val="149500"/>
               </a:lnSpc>
             </a:pPr>
             <a:r>
@@ -9224,7 +9092,7 @@
           <a:p>
             <a:pPr>
               <a:lnSpc>
-                <a:spcPct val="115000"/>
+                <a:spcPct val="149500"/>
               </a:lnSpc>
             </a:pPr>
             <a:r>
@@ -9729,7 +9597,7 @@
           <a:p>
             <a:pPr>
               <a:lnSpc>
-                <a:spcPct val="115000"/>
+                <a:spcPct val="149500"/>
               </a:lnSpc>
             </a:pPr>
             <a:r>
@@ -9754,7 +9622,7 @@
           <a:p>
             <a:pPr>
               <a:lnSpc>
-                <a:spcPct val="115000"/>
+                <a:spcPct val="149500"/>
               </a:lnSpc>
             </a:pPr>
             <a:r>
@@ -9779,7 +9647,7 @@
           <a:p>
             <a:pPr>
               <a:lnSpc>
-                <a:spcPct val="115000"/>
+                <a:spcPct val="149500"/>
               </a:lnSpc>
             </a:pPr>
             <a:r>
@@ -9804,7 +9672,7 @@
           <a:p>
             <a:pPr>
               <a:lnSpc>
-                <a:spcPct val="115000"/>
+                <a:spcPct val="149500"/>
               </a:lnSpc>
             </a:pPr>
             <a:r>
@@ -10424,7 +10292,7 @@
           <a:p>
             <a:pPr>
               <a:lnSpc>
-                <a:spcPct val="115000"/>
+                <a:spcPct val="149500"/>
               </a:lnSpc>
             </a:pPr>
             <a:r>
@@ -10449,7 +10317,7 @@
           <a:p>
             <a:pPr>
               <a:lnSpc>
-                <a:spcPct val="115000"/>
+                <a:spcPct val="149500"/>
               </a:lnSpc>
             </a:pPr>
             <a:r>
@@ -10474,7 +10342,7 @@
           <a:p>
             <a:pPr>
               <a:lnSpc>
-                <a:spcPct val="115000"/>
+                <a:spcPct val="149500"/>
               </a:lnSpc>
             </a:pPr>
             <a:r>
@@ -11216,7 +11084,7 @@
           <a:p>
             <a:pPr>
               <a:lnSpc>
-                <a:spcPct val="115000"/>
+                <a:spcPct val="149500"/>
               </a:lnSpc>
             </a:pPr>
             <a:r>
@@ -11241,7 +11109,7 @@
           <a:p>
             <a:pPr>
               <a:lnSpc>
-                <a:spcPct val="115000"/>
+                <a:spcPct val="149500"/>
               </a:lnSpc>
             </a:pPr>
             <a:r>
@@ -11266,7 +11134,7 @@
           <a:p>
             <a:pPr>
               <a:lnSpc>
-                <a:spcPct val="115000"/>
+                <a:spcPct val="149500"/>
               </a:lnSpc>
             </a:pPr>
             <a:r>

--- a/class/cloud_infra_mgmt/09주차_Terraform_IaC기초/01_강의자료/1차시_IaC개념과Terraform아키텍처.pptx
+++ b/class/cloud_infra_mgmt/09주차_Terraform_IaC기초/01_강의자료/1차시_IaC개념과Terraform아키텍처.pptx
@@ -4986,6 +4986,8 @@
                   <a:srgbClr val="14B8A6"/>
                 </a:solidFill>
                 <a:latin typeface="맑은 고딕"/>
+                <a:ea typeface="맑은 고딕"/>
+                <a:cs typeface="맑은 고딕"/>
               </a:rPr>
               <a:t>클라우드인프라관리  ·  9주차 1차시</a:t>
             </a:r>
@@ -5021,6 +5023,8 @@
                   <a:srgbClr val="FFFFFF"/>
                 </a:solidFill>
                 <a:latin typeface="맑은 고딕"/>
+                <a:ea typeface="맑은 고딕"/>
+                <a:cs typeface="맑은 고딕"/>
               </a:rPr>
               <a:t>IaC 개념과 Terraform 아키텍처</a:t>
             </a:r>
@@ -5056,6 +5060,8 @@
                   <a:srgbClr val="C9D3E6"/>
                 </a:solidFill>
                 <a:latin typeface="맑은 고딕"/>
+                <a:ea typeface="맑은 고딕"/>
+                <a:cs typeface="맑은 고딕"/>
               </a:rPr>
               <a:t>인프라를 코드로 관리한다는 것</a:t>
             </a:r>
@@ -5091,6 +5097,8 @@
                   <a:srgbClr val="FFFFFF"/>
                 </a:solidFill>
                 <a:latin typeface="맑은 고딕"/>
+                <a:ea typeface="맑은 고딕"/>
+                <a:cs typeface="맑은 고딕"/>
               </a:rPr>
               <a:t>영남이공대학교 김지윤교수</a:t>
             </a:r>
@@ -5250,6 +5258,8 @@
                   <a:srgbClr val="14213D"/>
                 </a:solidFill>
                 <a:latin typeface="맑은 고딕"/>
+                <a:ea typeface="맑은 고딕"/>
+                <a:cs typeface="맑은 고딕"/>
               </a:rPr>
               <a:t>02</a:t>
             </a:r>
@@ -5285,6 +5295,8 @@
                   <a:srgbClr val="14B8A6"/>
                 </a:solidFill>
                 <a:latin typeface="맑은 고딕"/>
+                <a:ea typeface="맑은 고딕"/>
+                <a:cs typeface="맑은 고딕"/>
               </a:rPr>
               <a:t>PART 2 · Terraform 아키텍처</a:t>
             </a:r>
@@ -5320,6 +5332,8 @@
                   <a:srgbClr val="FFFFFF"/>
                 </a:solidFill>
                 <a:latin typeface="맑은 고딕"/>
+                <a:ea typeface="맑은 고딕"/>
+                <a:cs typeface="맑은 고딕"/>
               </a:rPr>
               <a:t>핵심 명령어 4가지 (개념만 먼저)</a:t>
             </a:r>
@@ -5359,6 +5373,8 @@
                   <a:srgbClr val="0D9488"/>
                 </a:solidFill>
                 <a:latin typeface="맑은 고딕"/>
+                <a:ea typeface="맑은 고딕"/>
+                <a:cs typeface="맑은 고딕"/>
               </a:rPr>
               <a:t>●  </a:t>
             </a:r>
@@ -5368,6 +5384,8 @@
                   <a:srgbClr val="222733"/>
                 </a:solidFill>
                 <a:latin typeface="맑은 고딕"/>
+                <a:ea typeface="맑은 고딕"/>
+                <a:cs typeface="맑은 고딕"/>
               </a:rPr>
               <a:t>terraform init — Provider 다운로드 및 작업 폴더 초기화</a:t>
             </a:r>
@@ -5384,6 +5402,8 @@
                   <a:srgbClr val="0D9488"/>
                 </a:solidFill>
                 <a:latin typeface="맑은 고딕"/>
+                <a:ea typeface="맑은 고딕"/>
+                <a:cs typeface="맑은 고딕"/>
               </a:rPr>
               <a:t>●  </a:t>
             </a:r>
@@ -5393,6 +5413,8 @@
                   <a:srgbClr val="222733"/>
                 </a:solidFill>
                 <a:latin typeface="맑은 고딕"/>
+                <a:ea typeface="맑은 고딕"/>
+                <a:cs typeface="맑은 고딕"/>
               </a:rPr>
               <a:t>terraform plan — 코드를 실행하면 무엇이 바뀔지 미리 보여줌(실제로 적용 안 함)</a:t>
             </a:r>
@@ -5409,6 +5431,8 @@
                   <a:srgbClr val="0D9488"/>
                 </a:solidFill>
                 <a:latin typeface="맑은 고딕"/>
+                <a:ea typeface="맑은 고딕"/>
+                <a:cs typeface="맑은 고딕"/>
               </a:rPr>
               <a:t>●  </a:t>
             </a:r>
@@ -5418,6 +5442,8 @@
                   <a:srgbClr val="222733"/>
                 </a:solidFill>
                 <a:latin typeface="맑은 고딕"/>
+                <a:ea typeface="맑은 고딕"/>
+                <a:cs typeface="맑은 고딕"/>
               </a:rPr>
               <a:t>terraform apply — plan 내용을 실제로 실행해 인프라를 생성·변경</a:t>
             </a:r>
@@ -5434,6 +5460,8 @@
                   <a:srgbClr val="0D9488"/>
                 </a:solidFill>
                 <a:latin typeface="맑은 고딕"/>
+                <a:ea typeface="맑은 고딕"/>
+                <a:cs typeface="맑은 고딕"/>
               </a:rPr>
               <a:t>●  </a:t>
             </a:r>
@@ -5443,6 +5471,8 @@
                   <a:srgbClr val="222733"/>
                 </a:solidFill>
                 <a:latin typeface="맑은 고딕"/>
+                <a:ea typeface="맑은 고딕"/>
+                <a:cs typeface="맑은 고딕"/>
               </a:rPr>
               <a:t>terraform destroy — 코드로 만든 인프라를 코드로 깔끔하게 제거</a:t>
             </a:r>
@@ -5478,6 +5508,8 @@
                   <a:srgbClr val="5B6373"/>
                 </a:solidFill>
                 <a:latin typeface="맑은 고딕"/>
+                <a:ea typeface="맑은 고딕"/>
+                <a:cs typeface="맑은 고딕"/>
               </a:rPr>
               <a:t>클라우드인프라관리  ·  9주차 1차시</a:t>
             </a:r>
@@ -5513,6 +5545,8 @@
                   <a:srgbClr val="5B6373"/>
                 </a:solidFill>
                 <a:latin typeface="맑은 고딕"/>
+                <a:ea typeface="맑은 고딕"/>
+                <a:cs typeface="맑은 고딕"/>
               </a:rPr>
               <a:t>10 / 14</a:t>
             </a:r>
@@ -5716,6 +5750,8 @@
                   <a:srgbClr val="14213D"/>
                 </a:solidFill>
                 <a:latin typeface="맑은 고딕"/>
+                <a:ea typeface="맑은 고딕"/>
+                <a:cs typeface="맑은 고딕"/>
               </a:rPr>
               <a:t>03</a:t>
             </a:r>
@@ -5751,6 +5787,8 @@
                   <a:srgbClr val="14B8A6"/>
                 </a:solidFill>
                 <a:latin typeface="맑은 고딕"/>
+                <a:ea typeface="맑은 고딕"/>
+                <a:cs typeface="맑은 고딕"/>
               </a:rPr>
               <a:t>실습 안내</a:t>
             </a:r>
@@ -5786,6 +5824,8 @@
                   <a:srgbClr val="FFFFFF"/>
                 </a:solidFill>
                 <a:latin typeface="맑은 고딕"/>
+                <a:ea typeface="맑은 고딕"/>
+                <a:cs typeface="맑은 고딕"/>
               </a:rPr>
               <a:t>Killercoda — Terraform CLI 샌드박스 체험</a:t>
             </a:r>
@@ -5825,6 +5865,8 @@
                   <a:srgbClr val="0D9488"/>
                 </a:solidFill>
                 <a:latin typeface="맑은 고딕"/>
+                <a:ea typeface="맑은 고딕"/>
+                <a:cs typeface="맑은 고딕"/>
               </a:rPr>
               <a:t>●  </a:t>
             </a:r>
@@ -5834,6 +5876,8 @@
                   <a:srgbClr val="222733"/>
                 </a:solidFill>
                 <a:latin typeface="맑은 고딕"/>
+                <a:ea typeface="맑은 고딕"/>
+                <a:cs typeface="맑은 고딕"/>
               </a:rPr>
               <a:t>이미 Terraform이 설치된 Killercoda 환경에서 간단한 로컬 파일(local_file) 리소스 실습</a:t>
             </a:r>
@@ -5850,6 +5894,8 @@
                   <a:srgbClr val="0D9488"/>
                 </a:solidFill>
                 <a:latin typeface="맑은 고딕"/>
+                <a:ea typeface="맑은 고딕"/>
+                <a:cs typeface="맑은 고딕"/>
               </a:rPr>
               <a:t>●  </a:t>
             </a:r>
@@ -5859,6 +5905,8 @@
                   <a:srgbClr val="222733"/>
                 </a:solidFill>
                 <a:latin typeface="맑은 고딕"/>
+                <a:ea typeface="맑은 고딕"/>
+                <a:cs typeface="맑은 고딕"/>
               </a:rPr>
               <a:t>terraform init → terraform plan → terraform apply 순서로 실행해보고 파일이 생성되는 것 확인</a:t>
             </a:r>
@@ -5875,6 +5923,8 @@
                   <a:srgbClr val="0D9488"/>
                 </a:solidFill>
                 <a:latin typeface="맑은 고딕"/>
+                <a:ea typeface="맑은 고딕"/>
+                <a:cs typeface="맑은 고딕"/>
               </a:rPr>
               <a:t>●  </a:t>
             </a:r>
@@ -5884,6 +5934,8 @@
                   <a:srgbClr val="222733"/>
                 </a:solidFill>
                 <a:latin typeface="맑은 고딕"/>
+                <a:ea typeface="맑은 고딕"/>
+                <a:cs typeface="맑은 고딕"/>
               </a:rPr>
               <a:t>terraform destroy로 다시 삭제 — '코드로 만들고 코드로 지운다'는 감각을 먼저 익힘</a:t>
             </a:r>
@@ -5919,6 +5971,8 @@
                   <a:srgbClr val="5B6373"/>
                 </a:solidFill>
                 <a:latin typeface="맑은 고딕"/>
+                <a:ea typeface="맑은 고딕"/>
+                <a:cs typeface="맑은 고딕"/>
               </a:rPr>
               <a:t>클라우드인프라관리  ·  9주차 1차시</a:t>
             </a:r>
@@ -5954,6 +6008,8 @@
                   <a:srgbClr val="5B6373"/>
                 </a:solidFill>
                 <a:latin typeface="맑은 고딕"/>
+                <a:ea typeface="맑은 고딕"/>
+                <a:cs typeface="맑은 고딕"/>
               </a:rPr>
               <a:t>11 / 14</a:t>
             </a:r>
@@ -6157,6 +6213,8 @@
                   <a:srgbClr val="14213D"/>
                 </a:solidFill>
                 <a:latin typeface="맑은 고딕"/>
+                <a:ea typeface="맑은 고딕"/>
+                <a:cs typeface="맑은 고딕"/>
               </a:rPr>
               <a:t>03</a:t>
             </a:r>
@@ -6192,6 +6250,8 @@
                   <a:srgbClr val="14B8A6"/>
                 </a:solidFill>
                 <a:latin typeface="맑은 고딕"/>
+                <a:ea typeface="맑은 고딕"/>
+                <a:cs typeface="맑은 고딕"/>
               </a:rPr>
               <a:t>실습 안내</a:t>
             </a:r>
@@ -6227,6 +6287,8 @@
                   <a:srgbClr val="FFFFFF"/>
                 </a:solidFill>
                 <a:latin typeface="맑은 고딕"/>
+                <a:ea typeface="맑은 고딕"/>
+                <a:cs typeface="맑은 고딕"/>
               </a:rPr>
               <a:t>VM 안내 — 다음 차시 예고</a:t>
             </a:r>
@@ -6266,6 +6328,8 @@
                   <a:srgbClr val="0D9488"/>
                 </a:solidFill>
                 <a:latin typeface="맑은 고딕"/>
+                <a:ea typeface="맑은 고딕"/>
+                <a:cs typeface="맑은 고딕"/>
               </a:rPr>
               <a:t>●  </a:t>
             </a:r>
@@ -6275,6 +6339,8 @@
                   <a:srgbClr val="222733"/>
                 </a:solidFill>
                 <a:latin typeface="맑은 고딕"/>
+                <a:ea typeface="맑은 고딕"/>
+                <a:cs typeface="맑은 고딕"/>
               </a:rPr>
               <a:t>오늘은 개념 위주였고, 개인 VM에는 아직 Terraform이 설치되어 있지 않습니다</a:t>
             </a:r>
@@ -6291,6 +6357,8 @@
                   <a:srgbClr val="0D9488"/>
                 </a:solidFill>
                 <a:latin typeface="맑은 고딕"/>
+                <a:ea typeface="맑은 고딕"/>
+                <a:cs typeface="맑은 고딕"/>
               </a:rPr>
               <a:t>●  </a:t>
             </a:r>
@@ -6300,6 +6368,8 @@
                   <a:srgbClr val="222733"/>
                 </a:solidFill>
                 <a:latin typeface="맑은 고딕"/>
+                <a:ea typeface="맑은 고딕"/>
+                <a:cs typeface="맑은 고딕"/>
               </a:rPr>
               <a:t>다음 2차시에 VM에 Terraform을 직접 설치하고, 실제 Docker 컨테이너를 코드로 배포해봅니다</a:t>
             </a:r>
@@ -6316,6 +6386,8 @@
                   <a:srgbClr val="0D9488"/>
                 </a:solidFill>
                 <a:latin typeface="맑은 고딕"/>
+                <a:ea typeface="맑은 고딕"/>
+                <a:cs typeface="맑은 고딕"/>
               </a:rPr>
               <a:t>●  </a:t>
             </a:r>
@@ -6325,6 +6397,8 @@
                   <a:srgbClr val="222733"/>
                 </a:solidFill>
                 <a:latin typeface="맑은 고딕"/>
+                <a:ea typeface="맑은 고딕"/>
+                <a:cs typeface="맑은 고딕"/>
               </a:rPr>
               <a:t>미리 HashiCorp 공식 홈페이지에서 Terraform이 무엇인지 한 번 훑어보면 좋습니다(선택)</a:t>
             </a:r>
@@ -6360,6 +6434,8 @@
                   <a:srgbClr val="5B6373"/>
                 </a:solidFill>
                 <a:latin typeface="맑은 고딕"/>
+                <a:ea typeface="맑은 고딕"/>
+                <a:cs typeface="맑은 고딕"/>
               </a:rPr>
               <a:t>클라우드인프라관리  ·  9주차 1차시</a:t>
             </a:r>
@@ -6395,6 +6471,8 @@
                   <a:srgbClr val="5B6373"/>
                 </a:solidFill>
                 <a:latin typeface="맑은 고딕"/>
+                <a:ea typeface="맑은 고딕"/>
+                <a:cs typeface="맑은 고딕"/>
               </a:rPr>
               <a:t>12 / 14</a:t>
             </a:r>
@@ -6580,6 +6658,8 @@
                   <a:srgbClr val="FFFFFF"/>
                 </a:solidFill>
                 <a:latin typeface="맑은 고딕"/>
+                <a:ea typeface="맑은 고딕"/>
+                <a:cs typeface="맑은 고딕"/>
               </a:rPr>
               <a:t>오늘의 정리</a:t>
             </a:r>
@@ -6633,6 +6713,8 @@
                   <a:srgbClr val="14213D"/>
                 </a:solidFill>
                 <a:latin typeface="맑은 고딕"/>
+                <a:ea typeface="맑은 고딕"/>
+                <a:cs typeface="맑은 고딕"/>
               </a:rPr>
               <a:t>1</a:t>
             </a:r>
@@ -6668,6 +6750,8 @@
                   <a:srgbClr val="FFFFFF"/>
                 </a:solidFill>
                 <a:latin typeface="맑은 고딕"/>
+                <a:ea typeface="맑은 고딕"/>
+                <a:cs typeface="맑은 고딕"/>
               </a:rPr>
               <a:t>IaC는 인프라를 코드로 선언하고 그 코드로 생성·변경·삭제하는 방식이다</a:t>
             </a:r>
@@ -6721,6 +6805,8 @@
                   <a:srgbClr val="14213D"/>
                 </a:solidFill>
                 <a:latin typeface="맑은 고딕"/>
+                <a:ea typeface="맑은 고딕"/>
+                <a:cs typeface="맑은 고딕"/>
               </a:rPr>
               <a:t>2</a:t>
             </a:r>
@@ -6756,6 +6842,8 @@
                   <a:srgbClr val="FFFFFF"/>
                 </a:solidFill>
                 <a:latin typeface="맑은 고딕"/>
+                <a:ea typeface="맑은 고딕"/>
+                <a:cs typeface="맑은 고딕"/>
               </a:rPr>
               <a:t>Terraform은 HCL 코드를 Provider를 통해 실제 인프라로 만들며, init/plan/apply/destroy로 다룬다</a:t>
             </a:r>
@@ -6897,6 +6985,8 @@
                   <a:srgbClr val="FFFFFF"/>
                 </a:solidFill>
                 <a:latin typeface="맑은 고딕"/>
+                <a:ea typeface="맑은 고딕"/>
+                <a:cs typeface="맑은 고딕"/>
               </a:rPr>
               <a:t>다음 차시 예고</a:t>
             </a:r>
@@ -6932,6 +7022,8 @@
                   <a:srgbClr val="14B8A6"/>
                 </a:solidFill>
                 <a:latin typeface="맑은 고딕"/>
+                <a:ea typeface="맑은 고딕"/>
+                <a:cs typeface="맑은 고딕"/>
               </a:rPr>
               <a:t>다음 차시 예고 — 9주차 2차시</a:t>
             </a:r>
@@ -6967,6 +7059,8 @@
                   <a:srgbClr val="FFFFFF"/>
                 </a:solidFill>
                 <a:latin typeface="맑은 고딕"/>
+                <a:ea typeface="맑은 고딕"/>
+                <a:cs typeface="맑은 고딕"/>
               </a:rPr>
               <a:t>개인 VM에 Terraform을 직접 설치하고, HCL 문법을 배워 실제 Docker 컨테이너를 코드로 배포해봅니다.</a:t>
             </a:r>
@@ -7108,6 +7202,8 @@
                   <a:srgbClr val="14B8A6"/>
                 </a:solidFill>
                 <a:latin typeface="맑은 고딕"/>
+                <a:ea typeface="맑은 고딕"/>
+                <a:cs typeface="맑은 고딕"/>
               </a:rPr>
               <a:t>SESSION OVERVIEW</a:t>
             </a:r>
@@ -7143,6 +7239,8 @@
                   <a:srgbClr val="FFFFFF"/>
                 </a:solidFill>
                 <a:latin typeface="맑은 고딕"/>
+                <a:ea typeface="맑은 고딕"/>
+                <a:cs typeface="맑은 고딕"/>
               </a:rPr>
               <a:t>오늘의 학습 목표</a:t>
             </a:r>
@@ -7182,6 +7280,8 @@
                   <a:srgbClr val="222733"/>
                 </a:solidFill>
                 <a:latin typeface="맑은 고딕"/>
+                <a:ea typeface="맑은 고딕"/>
+                <a:cs typeface="맑은 고딕"/>
               </a:rPr>
               <a:t>1.  왜 인프라를 코드로 관리해야 하는지(IaC) 이해한다</a:t>
             </a:r>
@@ -7198,6 +7298,8 @@
                   <a:srgbClr val="222733"/>
                 </a:solidFill>
                 <a:latin typeface="맑은 고딕"/>
+                <a:ea typeface="맑은 고딕"/>
+                <a:cs typeface="맑은 고딕"/>
               </a:rPr>
               <a:t>2.  Terraform의 기본 아키텍처(HCL·Provider)를 이해한다</a:t>
             </a:r>
@@ -7214,6 +7316,8 @@
                   <a:srgbClr val="222733"/>
                 </a:solidFill>
                 <a:latin typeface="맑은 고딕"/>
+                <a:ea typeface="맑은 고딕"/>
+                <a:cs typeface="맑은 고딕"/>
               </a:rPr>
               <a:t>3.  Terraform 핵심 명령어(init/plan/apply/destroy)의 역할을 이해한다</a:t>
             </a:r>
@@ -7249,6 +7353,8 @@
                   <a:srgbClr val="5B6373"/>
                 </a:solidFill>
                 <a:latin typeface="맑은 고딕"/>
+                <a:ea typeface="맑은 고딕"/>
+                <a:cs typeface="맑은 고딕"/>
               </a:rPr>
               <a:t>클라우드인프라관리  ·  9주차 1차시</a:t>
             </a:r>
@@ -7284,6 +7390,8 @@
                   <a:srgbClr val="5B6373"/>
                 </a:solidFill>
                 <a:latin typeface="맑은 고딕"/>
+                <a:ea typeface="맑은 고딕"/>
+                <a:cs typeface="맑은 고딕"/>
               </a:rPr>
               <a:t>02 / 14</a:t>
             </a:r>
@@ -7469,6 +7577,8 @@
                   <a:srgbClr val="14B8A6"/>
                 </a:solidFill>
                 <a:latin typeface="맑은 고딕"/>
+                <a:ea typeface="맑은 고딕"/>
+                <a:cs typeface="맑은 고딕"/>
               </a:rPr>
               <a:t>SESSION OVERVIEW</a:t>
             </a:r>
@@ -7504,6 +7614,8 @@
                   <a:srgbClr val="FFFFFF"/>
                 </a:solidFill>
                 <a:latin typeface="맑은 고딕"/>
+                <a:ea typeface="맑은 고딕"/>
+                <a:cs typeface="맑은 고딕"/>
               </a:rPr>
               <a:t>오늘의 진행 순서</a:t>
             </a:r>
@@ -7715,6 +7827,8 @@
                   <a:srgbClr val="FFFFFF"/>
                 </a:solidFill>
                 <a:latin typeface="맑은 고딕"/>
+                <a:ea typeface="맑은 고딕"/>
+                <a:cs typeface="맑은 고딕"/>
               </a:rPr>
               <a:t>1</a:t>
             </a:r>
@@ -7798,6 +7912,8 @@
                   <a:srgbClr val="14213D"/>
                 </a:solidFill>
                 <a:latin typeface="맑은 고딕"/>
+                <a:ea typeface="맑은 고딕"/>
+                <a:cs typeface="맑은 고딕"/>
               </a:rPr>
               <a:t>개념 설명</a:t>
             </a:r>
@@ -7837,6 +7953,8 @@
                   <a:srgbClr val="222733"/>
                 </a:solidFill>
                 <a:latin typeface="맑은 고딕"/>
+                <a:ea typeface="맑은 고딕"/>
+                <a:cs typeface="맑은 고딕"/>
               </a:rPr>
               <a:t>강의자료 기반 직접 강의</a:t>
             </a:r>
@@ -7916,6 +8034,8 @@
                   <a:srgbClr val="FFFFFF"/>
                 </a:solidFill>
                 <a:latin typeface="맑은 고딕"/>
+                <a:ea typeface="맑은 고딕"/>
+                <a:cs typeface="맑은 고딕"/>
               </a:rPr>
               <a:t>2</a:t>
             </a:r>
@@ -7999,6 +8119,8 @@
                   <a:srgbClr val="14213D"/>
                 </a:solidFill>
                 <a:latin typeface="맑은 고딕"/>
+                <a:ea typeface="맑은 고딕"/>
+                <a:cs typeface="맑은 고딕"/>
               </a:rPr>
               <a:t>Killercoda</a:t>
             </a:r>
@@ -8038,6 +8160,8 @@
                   <a:srgbClr val="222733"/>
                 </a:solidFill>
                 <a:latin typeface="맑은 고딕"/>
+                <a:ea typeface="맑은 고딕"/>
+                <a:cs typeface="맑은 고딕"/>
               </a:rPr>
               <a:t>Terraform CLI 샌드박스 체험</a:t>
             </a:r>
@@ -8117,6 +8241,8 @@
                   <a:srgbClr val="FFFFFF"/>
                 </a:solidFill>
                 <a:latin typeface="맑은 고딕"/>
+                <a:ea typeface="맑은 고딕"/>
+                <a:cs typeface="맑은 고딕"/>
               </a:rPr>
               <a:t>3</a:t>
             </a:r>
@@ -8200,6 +8326,8 @@
                   <a:srgbClr val="14213D"/>
                 </a:solidFill>
                 <a:latin typeface="맑은 고딕"/>
+                <a:ea typeface="맑은 고딕"/>
+                <a:cs typeface="맑은 고딕"/>
               </a:rPr>
               <a:t>VM 안내</a:t>
             </a:r>
@@ -8239,6 +8367,8 @@
                   <a:srgbClr val="222733"/>
                 </a:solidFill>
                 <a:latin typeface="맑은 고딕"/>
+                <a:ea typeface="맑은 고딕"/>
+                <a:cs typeface="맑은 고딕"/>
               </a:rPr>
               <a:t>다음 차시 설치 예고</a:t>
             </a:r>
@@ -8318,6 +8448,8 @@
                   <a:srgbClr val="FFFFFF"/>
                 </a:solidFill>
                 <a:latin typeface="맑은 고딕"/>
+                <a:ea typeface="맑은 고딕"/>
+                <a:cs typeface="맑은 고딕"/>
               </a:rPr>
               <a:t>4</a:t>
             </a:r>
@@ -8401,6 +8533,8 @@
                   <a:srgbClr val="14213D"/>
                 </a:solidFill>
                 <a:latin typeface="맑은 고딕"/>
+                <a:ea typeface="맑은 고딕"/>
+                <a:cs typeface="맑은 고딕"/>
               </a:rPr>
               <a:t>결과 제출</a:t>
             </a:r>
@@ -8440,6 +8574,8 @@
                   <a:srgbClr val="222733"/>
                 </a:solidFill>
                 <a:latin typeface="맑은 고딕"/>
+                <a:ea typeface="맑은 고딕"/>
+                <a:cs typeface="맑은 고딕"/>
               </a:rPr>
               <a:t>체크리스트 제출</a:t>
             </a:r>
@@ -8475,6 +8611,8 @@
                   <a:srgbClr val="5B6373"/>
                 </a:solidFill>
                 <a:latin typeface="맑은 고딕"/>
+                <a:ea typeface="맑은 고딕"/>
+                <a:cs typeface="맑은 고딕"/>
               </a:rPr>
               <a:t>클라우드인프라관리  ·  9주차 1차시</a:t>
             </a:r>
@@ -8510,6 +8648,8 @@
                   <a:srgbClr val="5B6373"/>
                 </a:solidFill>
                 <a:latin typeface="맑은 고딕"/>
+                <a:ea typeface="맑은 고딕"/>
+                <a:cs typeface="맑은 고딕"/>
               </a:rPr>
               <a:t>03 / 14</a:t>
             </a:r>
@@ -8713,6 +8853,8 @@
                   <a:srgbClr val="14213D"/>
                 </a:solidFill>
                 <a:latin typeface="맑은 고딕"/>
+                <a:ea typeface="맑은 고딕"/>
+                <a:cs typeface="맑은 고딕"/>
               </a:rPr>
               <a:t>PART 01</a:t>
             </a:r>
@@ -8748,6 +8890,8 @@
                   <a:srgbClr val="FFFFFF"/>
                 </a:solidFill>
                 <a:latin typeface="맑은 고딕"/>
+                <a:ea typeface="맑은 고딕"/>
+                <a:cs typeface="맑은 고딕"/>
               </a:rPr>
               <a:t>왜 인프라를 코드로 관리하는가</a:t>
             </a:r>
@@ -8783,6 +8927,8 @@
                   <a:srgbClr val="C9D3E6"/>
                 </a:solidFill>
                 <a:latin typeface="맑은 고딕"/>
+                <a:ea typeface="맑은 고딕"/>
+                <a:cs typeface="맑은 고딕"/>
               </a:rPr>
               <a:t>지금까지의 방식을 되돌아보며</a:t>
             </a:r>
@@ -8942,6 +9088,8 @@
                   <a:srgbClr val="14213D"/>
                 </a:solidFill>
                 <a:latin typeface="맑은 고딕"/>
+                <a:ea typeface="맑은 고딕"/>
+                <a:cs typeface="맑은 고딕"/>
               </a:rPr>
               <a:t>01</a:t>
             </a:r>
@@ -8977,6 +9125,8 @@
                   <a:srgbClr val="14B8A6"/>
                 </a:solidFill>
                 <a:latin typeface="맑은 고딕"/>
+                <a:ea typeface="맑은 고딕"/>
+                <a:cs typeface="맑은 고딕"/>
               </a:rPr>
               <a:t>PART 1 · IaC 개념</a:t>
             </a:r>
@@ -9012,6 +9162,8 @@
                   <a:srgbClr val="FFFFFF"/>
                 </a:solidFill>
                 <a:latin typeface="맑은 고딕"/>
+                <a:ea typeface="맑은 고딕"/>
+                <a:cs typeface="맑은 고딕"/>
               </a:rPr>
               <a:t>지금까지 우리는 손으로 인프라를 만들었다</a:t>
             </a:r>
@@ -9051,6 +9203,8 @@
                   <a:srgbClr val="0D9488"/>
                 </a:solidFill>
                 <a:latin typeface="맑은 고딕"/>
+                <a:ea typeface="맑은 고딕"/>
+                <a:cs typeface="맑은 고딕"/>
               </a:rPr>
               <a:t>●  </a:t>
             </a:r>
@@ -9060,6 +9214,8 @@
                   <a:srgbClr val="222733"/>
                 </a:solidFill>
                 <a:latin typeface="맑은 고딕"/>
+                <a:ea typeface="맑은 고딕"/>
+                <a:cs typeface="맑은 고딕"/>
               </a:rPr>
               <a:t>docker run, kubectl apply 등 — 전부 터미널에 명령어를 '손으로' 입력해서 만들었음</a:t>
             </a:r>
@@ -9076,6 +9232,8 @@
                   <a:srgbClr val="0D9488"/>
                 </a:solidFill>
                 <a:latin typeface="맑은 고딕"/>
+                <a:ea typeface="맑은 고딕"/>
+                <a:cs typeface="맑은 고딕"/>
               </a:rPr>
               <a:t>●  </a:t>
             </a:r>
@@ -9085,6 +9243,8 @@
                   <a:srgbClr val="222733"/>
                 </a:solidFill>
                 <a:latin typeface="맑은 고딕"/>
+                <a:ea typeface="맑은 고딕"/>
+                <a:cs typeface="맑은 고딕"/>
               </a:rPr>
               <a:t>서버가 1대일 땐 괜찮지만, 10대·100대라면? 같은 명령어를 몇 번이나 반복해야 할까</a:t>
             </a:r>
@@ -9101,6 +9261,8 @@
                   <a:srgbClr val="0D9488"/>
                 </a:solidFill>
                 <a:latin typeface="맑은 고딕"/>
+                <a:ea typeface="맑은 고딕"/>
+                <a:cs typeface="맑은 고딕"/>
               </a:rPr>
               <a:t>●  </a:t>
             </a:r>
@@ -9110,6 +9272,8 @@
                   <a:srgbClr val="222733"/>
                 </a:solidFill>
                 <a:latin typeface="맑은 고딕"/>
+                <a:ea typeface="맑은 고딕"/>
+                <a:cs typeface="맑은 고딕"/>
               </a:rPr>
               <a:t>사람이 실행하면 실수·누락이 생기고, '어떻게 만들었는지' 기록도 안 남음</a:t>
             </a:r>
@@ -9189,6 +9353,8 @@
                   <a:srgbClr val="FFFFFF"/>
                 </a:solidFill>
                 <a:latin typeface="맑은 고딕"/>
+                <a:ea typeface="맑은 고딕"/>
+                <a:cs typeface="맑은 고딕"/>
               </a:rPr>
               <a:t>💡  IaC(Infrastructure as Code)</a:t>
             </a:r>
@@ -9224,6 +9390,8 @@
                   <a:srgbClr val="FFFFFF"/>
                 </a:solidFill>
                 <a:latin typeface="맑은 고딕"/>
+                <a:ea typeface="맑은 고딕"/>
+                <a:cs typeface="맑은 고딕"/>
               </a:rPr>
               <a:t>인프라(서버, 네트워크, 컨테이너 등)를 코드로 선언하고, 그 코드로 생성·변경·삭제하는 방식</a:t>
             </a:r>
@@ -9259,6 +9427,8 @@
                   <a:srgbClr val="5B6373"/>
                 </a:solidFill>
                 <a:latin typeface="맑은 고딕"/>
+                <a:ea typeface="맑은 고딕"/>
+                <a:cs typeface="맑은 고딕"/>
               </a:rPr>
               <a:t>클라우드인프라관리  ·  9주차 1차시</a:t>
             </a:r>
@@ -9294,6 +9464,8 @@
                   <a:srgbClr val="5B6373"/>
                 </a:solidFill>
                 <a:latin typeface="맑은 고딕"/>
+                <a:ea typeface="맑은 고딕"/>
+                <a:cs typeface="맑은 고딕"/>
               </a:rPr>
               <a:t>05 / 14</a:t>
             </a:r>
@@ -9497,6 +9669,8 @@
                   <a:srgbClr val="14213D"/>
                 </a:solidFill>
                 <a:latin typeface="맑은 고딕"/>
+                <a:ea typeface="맑은 고딕"/>
+                <a:cs typeface="맑은 고딕"/>
               </a:rPr>
               <a:t>01</a:t>
             </a:r>
@@ -9532,6 +9706,8 @@
                   <a:srgbClr val="14B8A6"/>
                 </a:solidFill>
                 <a:latin typeface="맑은 고딕"/>
+                <a:ea typeface="맑은 고딕"/>
+                <a:cs typeface="맑은 고딕"/>
               </a:rPr>
               <a:t>PART 1 · IaC 개념</a:t>
             </a:r>
@@ -9567,6 +9743,8 @@
                   <a:srgbClr val="FFFFFF"/>
                 </a:solidFill>
                 <a:latin typeface="맑은 고딕"/>
+                <a:ea typeface="맑은 고딕"/>
+                <a:cs typeface="맑은 고딕"/>
               </a:rPr>
               <a:t>IaC가 주는 이점</a:t>
             </a:r>
@@ -9606,6 +9784,8 @@
                   <a:srgbClr val="0D9488"/>
                 </a:solidFill>
                 <a:latin typeface="맑은 고딕"/>
+                <a:ea typeface="맑은 고딕"/>
+                <a:cs typeface="맑은 고딕"/>
               </a:rPr>
               <a:t>●  </a:t>
             </a:r>
@@ -9615,6 +9795,8 @@
                   <a:srgbClr val="222733"/>
                 </a:solidFill>
                 <a:latin typeface="맑은 고딕"/>
+                <a:ea typeface="맑은 고딕"/>
+                <a:cs typeface="맑은 고딕"/>
               </a:rPr>
               <a:t>재현성 — 같은 코드를 실행하면 항상 같은 인프라가 만들어짐</a:t>
             </a:r>
@@ -9631,6 +9813,8 @@
                   <a:srgbClr val="0D9488"/>
                 </a:solidFill>
                 <a:latin typeface="맑은 고딕"/>
+                <a:ea typeface="맑은 고딕"/>
+                <a:cs typeface="맑은 고딕"/>
               </a:rPr>
               <a:t>●  </a:t>
             </a:r>
@@ -9640,6 +9824,8 @@
                   <a:srgbClr val="222733"/>
                 </a:solidFill>
                 <a:latin typeface="맑은 고딕"/>
+                <a:ea typeface="맑은 고딕"/>
+                <a:cs typeface="맑은 고딕"/>
               </a:rPr>
               <a:t>버전 관리 — 인프라 변경 이력을 Git처럼 추적 가능</a:t>
             </a:r>
@@ -9656,6 +9842,8 @@
                   <a:srgbClr val="0D9488"/>
                 </a:solidFill>
                 <a:latin typeface="맑은 고딕"/>
+                <a:ea typeface="맑은 고딕"/>
+                <a:cs typeface="맑은 고딕"/>
               </a:rPr>
               <a:t>●  </a:t>
             </a:r>
@@ -9665,6 +9853,8 @@
                   <a:srgbClr val="222733"/>
                 </a:solidFill>
                 <a:latin typeface="맑은 고딕"/>
+                <a:ea typeface="맑은 고딕"/>
+                <a:cs typeface="맑은 고딕"/>
               </a:rPr>
               <a:t>자동화 — 대량의 인프라도 코드 한 번 실행으로 구성</a:t>
             </a:r>
@@ -9681,6 +9871,8 @@
                   <a:srgbClr val="0D9488"/>
                 </a:solidFill>
                 <a:latin typeface="맑은 고딕"/>
+                <a:ea typeface="맑은 고딕"/>
+                <a:cs typeface="맑은 고딕"/>
               </a:rPr>
               <a:t>●  </a:t>
             </a:r>
@@ -9690,6 +9882,8 @@
                   <a:srgbClr val="222733"/>
                 </a:solidFill>
                 <a:latin typeface="맑은 고딕"/>
+                <a:ea typeface="맑은 고딕"/>
+                <a:cs typeface="맑은 고딕"/>
               </a:rPr>
               <a:t>문서화 — 코드 자체가 '지금 인프라가 어떻게 구성되어 있는지'의 기록이 됨</a:t>
             </a:r>
@@ -9725,6 +9919,8 @@
                   <a:srgbClr val="5B6373"/>
                 </a:solidFill>
                 <a:latin typeface="맑은 고딕"/>
+                <a:ea typeface="맑은 고딕"/>
+                <a:cs typeface="맑은 고딕"/>
               </a:rPr>
               <a:t>클라우드인프라관리  ·  9주차 1차시</a:t>
             </a:r>
@@ -9760,6 +9956,8 @@
                   <a:srgbClr val="5B6373"/>
                 </a:solidFill>
                 <a:latin typeface="맑은 고딕"/>
+                <a:ea typeface="맑은 고딕"/>
+                <a:cs typeface="맑은 고딕"/>
               </a:rPr>
               <a:t>06 / 14</a:t>
             </a:r>
@@ -9963,6 +10161,8 @@
                   <a:srgbClr val="14213D"/>
                 </a:solidFill>
                 <a:latin typeface="맑은 고딕"/>
+                <a:ea typeface="맑은 고딕"/>
+                <a:cs typeface="맑은 고딕"/>
               </a:rPr>
               <a:t>PART 02</a:t>
             </a:r>
@@ -9998,6 +10198,8 @@
                   <a:srgbClr val="FFFFFF"/>
                 </a:solidFill>
                 <a:latin typeface="맑은 고딕"/>
+                <a:ea typeface="맑은 고딕"/>
+                <a:cs typeface="맑은 고딕"/>
               </a:rPr>
               <a:t>Terraform 아키텍처</a:t>
             </a:r>
@@ -10033,6 +10235,8 @@
                   <a:srgbClr val="C9D3E6"/>
                 </a:solidFill>
                 <a:latin typeface="맑은 고딕"/>
+                <a:ea typeface="맑은 고딕"/>
+                <a:cs typeface="맑은 고딕"/>
               </a:rPr>
               <a:t>코드가 실제 인프라가 되기까지</a:t>
             </a:r>
@@ -10192,6 +10396,8 @@
                   <a:srgbClr val="14213D"/>
                 </a:solidFill>
                 <a:latin typeface="맑은 고딕"/>
+                <a:ea typeface="맑은 고딕"/>
+                <a:cs typeface="맑은 고딕"/>
               </a:rPr>
               <a:t>02</a:t>
             </a:r>
@@ -10227,6 +10433,8 @@
                   <a:srgbClr val="14B8A6"/>
                 </a:solidFill>
                 <a:latin typeface="맑은 고딕"/>
+                <a:ea typeface="맑은 고딕"/>
+                <a:cs typeface="맑은 고딕"/>
               </a:rPr>
               <a:t>PART 2 · Terraform 아키텍처</a:t>
             </a:r>
@@ -10262,6 +10470,8 @@
                   <a:srgbClr val="FFFFFF"/>
                 </a:solidFill>
                 <a:latin typeface="맑은 고딕"/>
+                <a:ea typeface="맑은 고딕"/>
+                <a:cs typeface="맑은 고딕"/>
               </a:rPr>
               <a:t>HCL 코드에서 실제 인프라까지</a:t>
             </a:r>
@@ -10301,6 +10511,8 @@
                   <a:srgbClr val="0D9488"/>
                 </a:solidFill>
                 <a:latin typeface="맑은 고딕"/>
+                <a:ea typeface="맑은 고딕"/>
+                <a:cs typeface="맑은 고딕"/>
               </a:rPr>
               <a:t>●  </a:t>
             </a:r>
@@ -10310,6 +10522,8 @@
                   <a:srgbClr val="222733"/>
                 </a:solidFill>
                 <a:latin typeface="맑은 고딕"/>
+                <a:ea typeface="맑은 고딕"/>
+                <a:cs typeface="맑은 고딕"/>
               </a:rPr>
               <a:t>HCL(HashiCorp Configuration Language) — Terraform 전용 선언형 문법으로 '원하는 상태'를 기술</a:t>
             </a:r>
@@ -10326,6 +10540,8 @@
                   <a:srgbClr val="0D9488"/>
                 </a:solidFill>
                 <a:latin typeface="맑은 고딕"/>
+                <a:ea typeface="맑은 고딕"/>
+                <a:cs typeface="맑은 고딕"/>
               </a:rPr>
               <a:t>●  </a:t>
             </a:r>
@@ -10335,6 +10551,8 @@
                   <a:srgbClr val="222733"/>
                 </a:solidFill>
                 <a:latin typeface="맑은 고딕"/>
+                <a:ea typeface="맑은 고딕"/>
+                <a:cs typeface="맑은 고딕"/>
               </a:rPr>
               <a:t>Terraform CLI가 이 코드를 읽고, Provider를 통해 실제 인프라 API를 호출</a:t>
             </a:r>
@@ -10351,6 +10569,8 @@
                   <a:srgbClr val="0D9488"/>
                 </a:solidFill>
                 <a:latin typeface="맑은 고딕"/>
+                <a:ea typeface="맑은 고딕"/>
+                <a:cs typeface="맑은 고딕"/>
               </a:rPr>
               <a:t>●  </a:t>
             </a:r>
@@ -10360,6 +10580,8 @@
                   <a:srgbClr val="222733"/>
                 </a:solidFill>
                 <a:latin typeface="맑은 고딕"/>
+                <a:ea typeface="맑은 고딕"/>
+                <a:cs typeface="맑은 고딕"/>
               </a:rPr>
               <a:t>Provider = Terraform과 각 인프라(Docker, AWS, GCP 등) 사이를 연결하는 플러그인</a:t>
             </a:r>
@@ -10395,6 +10617,8 @@
                   <a:srgbClr val="14213D"/>
                 </a:solidFill>
                 <a:latin typeface="맑은 고딕"/>
+                <a:ea typeface="맑은 고딕"/>
+                <a:cs typeface="맑은 고딕"/>
               </a:rPr>
               <a:t>Terraform 동작 흐름</a:t>
             </a:r>
@@ -10474,6 +10698,8 @@
                   <a:srgbClr val="FFFFFF"/>
                 </a:solidFill>
                 <a:latin typeface="맑은 고딕"/>
+                <a:ea typeface="맑은 고딕"/>
+                <a:cs typeface="맑은 고딕"/>
               </a:rPr>
               <a:t>HCL 코드(.tf 파일)</a:t>
             </a:r>
@@ -10553,6 +10779,8 @@
                   <a:srgbClr val="FFFFFF"/>
                 </a:solidFill>
                 <a:latin typeface="맑은 고딕"/>
+                <a:ea typeface="맑은 고딕"/>
+                <a:cs typeface="맑은 고딕"/>
               </a:rPr>
               <a:t>Terraform CLI</a:t>
             </a:r>
@@ -10632,6 +10860,8 @@
                   <a:srgbClr val="FFFFFF"/>
                 </a:solidFill>
                 <a:latin typeface="맑은 고딕"/>
+                <a:ea typeface="맑은 고딕"/>
+                <a:cs typeface="맑은 고딕"/>
               </a:rPr>
               <a:t>Provider (예: Docker, AWS)</a:t>
             </a:r>
@@ -10711,6 +10941,8 @@
                   <a:srgbClr val="FFFFFF"/>
                 </a:solidFill>
                 <a:latin typeface="맑은 고딕"/>
+                <a:ea typeface="맑은 고딕"/>
+                <a:cs typeface="맑은 고딕"/>
               </a:rPr>
               <a:t>실제 인프라</a:t>
             </a:r>
@@ -10746,6 +10978,8 @@
                   <a:srgbClr val="5B6373"/>
                 </a:solidFill>
                 <a:latin typeface="맑은 고딕"/>
+                <a:ea typeface="맑은 고딕"/>
+                <a:cs typeface="맑은 고딕"/>
               </a:rPr>
               <a:t>클라우드인프라관리  ·  9주차 1차시</a:t>
             </a:r>
@@ -10781,6 +11015,8 @@
                   <a:srgbClr val="5B6373"/>
                 </a:solidFill>
                 <a:latin typeface="맑은 고딕"/>
+                <a:ea typeface="맑은 고딕"/>
+                <a:cs typeface="맑은 고딕"/>
               </a:rPr>
               <a:t>08 / 14</a:t>
             </a:r>
@@ -10984,6 +11220,8 @@
                   <a:srgbClr val="14213D"/>
                 </a:solidFill>
                 <a:latin typeface="맑은 고딕"/>
+                <a:ea typeface="맑은 고딕"/>
+                <a:cs typeface="맑은 고딕"/>
               </a:rPr>
               <a:t>02</a:t>
             </a:r>
@@ -11019,6 +11257,8 @@
                   <a:srgbClr val="14B8A6"/>
                 </a:solidFill>
                 <a:latin typeface="맑은 고딕"/>
+                <a:ea typeface="맑은 고딕"/>
+                <a:cs typeface="맑은 고딕"/>
               </a:rPr>
               <a:t>PART 2 · Terraform 아키텍처</a:t>
             </a:r>
@@ -11054,6 +11294,8 @@
                   <a:srgbClr val="FFFFFF"/>
                 </a:solidFill>
                 <a:latin typeface="맑은 고딕"/>
+                <a:ea typeface="맑은 고딕"/>
+                <a:cs typeface="맑은 고딕"/>
               </a:rPr>
               <a:t>이번 학기에 쓸 Provider</a:t>
             </a:r>
@@ -11093,6 +11335,8 @@
                   <a:srgbClr val="0D9488"/>
                 </a:solidFill>
                 <a:latin typeface="맑은 고딕"/>
+                <a:ea typeface="맑은 고딕"/>
+                <a:cs typeface="맑은 고딕"/>
               </a:rPr>
               <a:t>●  </a:t>
             </a:r>
@@ -11102,6 +11346,8 @@
                   <a:srgbClr val="222733"/>
                 </a:solidFill>
                 <a:latin typeface="맑은 고딕"/>
+                <a:ea typeface="맑은 고딕"/>
+                <a:cs typeface="맑은 고딕"/>
               </a:rPr>
               <a:t>9주차: docker Provider — 로컬 VM의 Docker 컨테이너를 코드로 배포·통제</a:t>
             </a:r>
@@ -11118,6 +11364,8 @@
                   <a:srgbClr val="0D9488"/>
                 </a:solidFill>
                 <a:latin typeface="맑은 고딕"/>
+                <a:ea typeface="맑은 고딕"/>
+                <a:cs typeface="맑은 고딕"/>
               </a:rPr>
               <a:t>●  </a:t>
             </a:r>
@@ -11127,6 +11375,8 @@
                   <a:srgbClr val="222733"/>
                 </a:solidFill>
                 <a:latin typeface="맑은 고딕"/>
+                <a:ea typeface="맑은 고딕"/>
+                <a:cs typeface="맑은 고딕"/>
               </a:rPr>
               <a:t>10주차: Terraform Cloud + random Provider — 원격 실행과 State 관리 학습</a:t>
             </a:r>
@@ -11143,6 +11393,8 @@
                   <a:srgbClr val="0D9488"/>
                 </a:solidFill>
                 <a:latin typeface="맑은 고딕"/>
+                <a:ea typeface="맑은 고딕"/>
+                <a:cs typeface="맑은 고딕"/>
               </a:rPr>
               <a:t>●  </a:t>
             </a:r>
@@ -11152,6 +11404,8 @@
                   <a:srgbClr val="222733"/>
                 </a:solidFill>
                 <a:latin typeface="맑은 고딕"/>
+                <a:ea typeface="맑은 고딕"/>
+                <a:cs typeface="맑은 고딕"/>
               </a:rPr>
               <a:t>같은 HCL 문법으로 다양한 인프라(AWS, GCP, Docker 등)를 다룰 수 있다는 게 Terraform의 핵심 장점</a:t>
             </a:r>
@@ -11187,6 +11441,8 @@
                   <a:srgbClr val="5B6373"/>
                 </a:solidFill>
                 <a:latin typeface="맑은 고딕"/>
+                <a:ea typeface="맑은 고딕"/>
+                <a:cs typeface="맑은 고딕"/>
               </a:rPr>
               <a:t>클라우드인프라관리  ·  9주차 1차시</a:t>
             </a:r>
@@ -11222,6 +11478,8 @@
                   <a:srgbClr val="5B6373"/>
                 </a:solidFill>
                 <a:latin typeface="맑은 고딕"/>
+                <a:ea typeface="맑은 고딕"/>
+                <a:cs typeface="맑은 고딕"/>
               </a:rPr>
               <a:t>09 / 14</a:t>
             </a:r>

--- a/class/cloud_infra_mgmt/09주차_Terraform_IaC기초/01_강의자료/1차시_IaC개념과Terraform아키텍처.pptx
+++ b/class/cloud_infra_mgmt/09주차_Terraform_IaC기초/01_강의자료/1차시_IaC개념과Terraform아키텍처.pptx
@@ -6343,6 +6343,42 @@
                 <a:cs typeface="맑은 고딕"/>
               </a:rPr>
               <a:t>오늘은 개념 위주였고, 개인 VM에는 아직 Terraform이 설치되어 있지 않습니다</a:t>
+            </a:r>
+          </a:p>
+          <a:p>
+            <a:pPr>
+              <a:lnSpc>
+                <a:spcPct val="149500"/>
+              </a:lnSpc>
+            </a:pPr>
+            <a:r>
+              <a:rPr sz="1700" b="1">
+                <a:solidFill>
+                  <a:srgbClr val="0D9488"/>
+                </a:solidFill>
+                <a:latin typeface="맑은 고딕"/>
+                <a:ea typeface="맑은 고딕"/>
+                <a:cs typeface="맑은 고딕"/>
+              </a:rPr>
+              <a:t>●  VM 정리(필수): docker ps -a 확인 → docker stop/rm으로 컨테이너 정리 → docker system prune -a --volumes → minikube stop</a:t>
+            </a:r>
+          </a:p>
+          <a:p>
+            <a:pPr>
+              <a:lnSpc>
+                <a:spcPct val="149500"/>
+              </a:lnSpc>
+            </a:pPr>
+            <a:r>
+              <a:rPr sz="1700" b="1">
+                <a:solidFill>
+                  <a:srgbClr val="0D9488"/>
+                </a:solidFill>
+                <a:latin typeface="맑은 고딕"/>
+                <a:ea typeface="맑은 고딕"/>
+                <a:cs typeface="맑은 고딕"/>
+              </a:rPr>
+              <a:t>●  df -h로 정리 전후 디스크 여유 공간을 비교해보세요 (VM은 기본 2 vCPU·RAM 4GB)</a:t>
             </a:r>
           </a:p>
           <a:p>
